--- a/modulo-05/05.11 - Implantando um Aplicativo SAP Fiori Elements/05.11_Deploy_de_um_app_Fiori_elements.pptx
+++ b/modulo-05/05.11 - Implantando um Aplicativo SAP Fiori Elements/05.11_Deploy_de_um_app_Fiori_elements.pptx
@@ -1461,7 +1461,7 @@
                   <a:srgbClr val="8FA3C7"/>
                 </a:solidFill>
               </a:rPr>
-              <a:t>ABAP Moderno · Módulo 03 — SAP Fiori Elements com OData V4  ·  Aula 11 de 11 — Deploy</a:t>
+              <a:t>ABAP Moderno · Módulo 05 — SAP Fiori Elements com OData V4  ·  Aula 11 de 11 — Deploy</a:t>
             </a:r>
             <a:endParaRPr lang="en-US" sz="900" dirty="0"/>
           </a:p>
@@ -1607,7 +1607,7 @@
                   <a:srgbClr val="556B82"/>
                 </a:solidFill>
               </a:rPr>
-              <a:t>ABAP Moderno · Módulo 03 — SAP Fiori Elements com OData V4  ·  Aula 11 de 11 — Deploy</a:t>
+              <a:t>ABAP Moderno · Módulo 05 — SAP Fiori Elements com OData V4  ·  Aula 11 de 11 — Deploy</a:t>
             </a:r>
             <a:endParaRPr lang="en-US" sz="900" dirty="0"/>
           </a:p>
@@ -2038,7 +2038,7 @@
                   <a:srgbClr val="89D1FF"/>
                 </a:solidFill>
               </a:rPr>
-              <a:t>MÓDULO 03 · AULA 11 DE 11</a:t>
+              <a:t>MÓDULO 05 · AULA 11 DE 11</a:t>
             </a:r>
             <a:endParaRPr lang="en-US" sz="1400" dirty="0"/>
           </a:p>
@@ -2468,7 +2468,7 @@
                   <a:srgbClr val="8FA3C7"/>
                 </a:solidFill>
               </a:rPr>
-              <a:t>ABAP Moderno · Módulo 03 — SAP Fiori Elements com OData V4 · Design System SAP Horizon</a:t>
+              <a:t>ABAP Moderno · Módulo 05 — SAP Fiori Elements com OData V4 · Design System SAP Horizon</a:t>
             </a:r>
             <a:endParaRPr lang="en-US" sz="1100" dirty="0"/>
           </a:p>
@@ -2589,7 +2589,7 @@
                   <a:srgbClr val="FFFFFF"/>
                 </a:solidFill>
               </a:rPr>
-              <a:t>O que aprendemos na aula 03.11</a:t>
+              <a:t>O que aprendemos na aula 05.11</a:t>
             </a:r>
             <a:endParaRPr lang="en-US" sz="3200" dirty="0"/>
           </a:p>
@@ -3172,7 +3172,7 @@
                   <a:srgbClr val="FFFFFF"/>
                 </a:solidFill>
               </a:rPr>
-              <a:t>Revise a visão geral 03.00 e recrie o Manage Travels do zero no seu trial.</a:t>
+              <a:t>Revise a visão geral 05.00 e recrie o app Pedidos de Compras do zero no seu trial.</a:t>
             </a:r>
             <a:endParaRPr lang="en-US" sz="1500" dirty="0"/>
           </a:p>
@@ -3441,7 +3441,7 @@
                   <a:srgbClr val="1D2D3E"/>
                 </a:solidFill>
               </a:rPr>
-              <a:t>Módulo 03 em 11 aulas: Fiori Elements com OData V4</a:t>
+              <a:t>Módulo 05 em 11 aulas: Fiori Elements com OData V4</a:t>
             </a:r>
             <a:endParaRPr lang="en-US" sz="2800" dirty="0"/>
           </a:p>
@@ -5311,7 +5311,7 @@
                   <a:srgbClr val="1D2D3E"/>
                 </a:solidFill>
               </a:rPr>
-              <a:t>publicamos o Manage Travels no SAP BTP, abrimos o app fora da IDE e vemos como ele chega ao usuário final.</a:t>
+              <a:t>publicamos o app Pedidos de Compras no SAP BTP, abrimos o app fora da IDE e vemos como ele chega ao usuário final.</a:t>
             </a:r>
             <a:endParaRPr lang="en-US" sz="1400" dirty="0"/>
           </a:p>
@@ -5333,7 +5333,7 @@
         </p:blipFill>
         <p:spPr>
           <a:xfrm>
-            <a:off x="1696669" y="1847088"/>
+            <a:off x="3576218" y="1847088"/>
             <a:ext cx="347472" cy="347472"/>
           </a:xfrm>
           <a:prstGeom prst="rect">
@@ -5357,7 +5357,7 @@
         </p:blipFill>
         <p:spPr>
           <a:xfrm>
-            <a:off x="5455768" y="1847088"/>
+            <a:off x="1696669" y="1847088"/>
             <a:ext cx="347472" cy="347472"/>
           </a:xfrm>
           <a:prstGeom prst="rect">
@@ -5381,7 +5381,7 @@
         </p:blipFill>
         <p:spPr>
           <a:xfrm>
-            <a:off x="3576218" y="1847088"/>
+            <a:off x="5455768" y="1847088"/>
             <a:ext cx="347472" cy="347472"/>
           </a:xfrm>
           <a:prstGeom prst="rect">
@@ -5405,7 +5405,7 @@
         </p:blipFill>
         <p:spPr>
           <a:xfrm>
-            <a:off x="9214866" y="1847088"/>
+            <a:off x="7335317" y="1847088"/>
             <a:ext cx="347472" cy="347472"/>
           </a:xfrm>
           <a:prstGeom prst="rect">
@@ -5429,7 +5429,7 @@
         </p:blipFill>
         <p:spPr>
           <a:xfrm>
-            <a:off x="11094415" y="1847088"/>
+            <a:off x="9214866" y="1847088"/>
             <a:ext cx="347472" cy="347472"/>
           </a:xfrm>
           <a:prstGeom prst="rect">
@@ -5453,7 +5453,7 @@
         </p:blipFill>
         <p:spPr>
           <a:xfrm>
-            <a:off x="7335317" y="1847088"/>
+            <a:off x="11094415" y="1847088"/>
             <a:ext cx="347472" cy="347472"/>
           </a:xfrm>
           <a:prstGeom prst="rect">
@@ -5549,7 +5549,7 @@
         </p:blipFill>
         <p:spPr>
           <a:xfrm>
-            <a:off x="7335317" y="3858768"/>
+            <a:off x="9214866" y="3858768"/>
             <a:ext cx="347472" cy="347472"/>
           </a:xfrm>
           <a:prstGeom prst="rect">
@@ -5573,7 +5573,7 @@
         </p:blipFill>
         <p:spPr>
           <a:xfrm>
-            <a:off x="9214866" y="3858768"/>
+            <a:off x="7335317" y="3858768"/>
             <a:ext cx="347472" cy="347472"/>
           </a:xfrm>
           <a:prstGeom prst="rect">
@@ -6503,7 +6503,7 @@
                   <a:srgbClr val="89D1FF"/>
                 </a:solidFill>
               </a:rPr>
-              <a:t>AULA 03.11 · SEÇÃO 1</a:t>
+              <a:t>AULA 05.11 · SEÇÃO 1</a:t>
             </a:r>
             <a:endParaRPr lang="en-US" sz="1300" dirty="0"/>
           </a:p>
@@ -8030,7 +8030,7 @@
                   <a:srgbClr val="9DA5B4"/>
                 </a:solidFill>
               </a:rPr>
-              <a:t>travels</a:t>
+              <a:t>ui5/apps-list-reports/pedidos-compras</a:t>
             </a:r>
             <a:endParaRPr lang="en-US" sz="850" dirty="0"/>
           </a:p>
@@ -8376,6 +8376,26 @@
             </a:r>
             <a:endParaRPr lang="en-US" sz="950" dirty="0"/>
           </a:p>
+          <a:p>
+            <a:pPr algn="r" indent="0" marL="0">
+              <a:lnSpc>
+                <a:spcPct val="105000"/>
+              </a:lnSpc>
+              <a:buNone/>
+            </a:pPr>
+            <a:r>
+              <a:rPr lang="en-US" sz="950" dirty="0">
+                <a:solidFill>
+                  <a:srgbClr val="6E7681"/>
+                </a:solidFill>
+                <a:latin typeface="Courier New" pitchFamily="34" charset="0"/>
+                <a:ea typeface="Courier New" pitchFamily="34" charset="-122"/>
+                <a:cs typeface="Courier New" pitchFamily="34" charset="-120"/>
+              </a:rPr>
+              <a:t>17</a:t>
+            </a:r>
+            <a:endParaRPr lang="en-US" sz="950" dirty="0"/>
+          </a:p>
         </p:txBody>
       </p:sp>
       <p:sp>
@@ -8447,7 +8467,7 @@
                 <a:ea typeface="Courier New" pitchFamily="34" charset="-122"/>
                 <a:cs typeface="Courier New" pitchFamily="34" charset="-120"/>
               </a:rPr>
-              <a:t>"3.1"</a:t>
+              <a:t>"4.0"</a:t>
             </a:r>
             <a:endParaRPr lang="en-US" sz="950" dirty="0"/>
           </a:p>
@@ -8542,7 +8562,7 @@
                 <a:ea typeface="Courier New" pitchFamily="34" charset="-122"/>
                 <a:cs typeface="Courier New" pitchFamily="34" charset="-120"/>
               </a:rPr>
-              <a:t>travels</a:t>
+              <a:t>pedidoscompras</a:t>
             </a:r>
             <a:endParaRPr lang="en-US" sz="950" dirty="0"/>
           </a:p>
@@ -9206,7 +9226,7 @@
                 <a:ea typeface="Courier New" pitchFamily="34" charset="-122"/>
                 <a:cs typeface="Courier New" pitchFamily="34" charset="-120"/>
               </a:rPr>
-              <a:t>scp</a:t>
+              <a:t>client</a:t>
             </a:r>
             <a:r>
               <a:rPr lang="en-US" sz="950" dirty="0">
@@ -9231,15 +9251,15 @@
               <a:t> </a:t>
             </a:r>
             <a:r>
-              <a:rPr lang="en-US" sz="950" dirty="0">
-                <a:solidFill>
-                  <a:srgbClr val="CCCCCC"/>
-                </a:solidFill>
-                <a:latin typeface="Courier New" pitchFamily="34" charset="0"/>
-                <a:ea typeface="Courier New" pitchFamily="34" charset="-122"/>
-                <a:cs typeface="Courier New" pitchFamily="34" charset="-120"/>
-              </a:rPr>
-              <a:t>true</a:t>
+              <a:rPr lang="en-US" sz="950" i="1" dirty="0">
+                <a:solidFill>
+                  <a:srgbClr val="6A9955"/>
+                </a:solidFill>
+                <a:latin typeface="Courier New" pitchFamily="34" charset="0"/>
+                <a:ea typeface="Courier New" pitchFamily="34" charset="-122"/>
+                <a:cs typeface="Courier New" pitchFamily="34" charset="-120"/>
+              </a:rPr>
+              <a:t>"100"</a:t>
             </a:r>
             <a:endParaRPr lang="en-US" sz="950" dirty="0"/>
           </a:p>
@@ -9259,7 +9279,7 @@
                 <a:ea typeface="Courier New" pitchFamily="34" charset="-122"/>
                 <a:cs typeface="Courier New" pitchFamily="34" charset="-120"/>
               </a:rPr>
-              <a:t>        </a:t>
+              <a:t>          </a:t>
             </a:r>
             <a:r>
               <a:rPr lang="en-US" sz="950" dirty="0">
@@ -9270,7 +9290,7 @@
                 <a:ea typeface="Courier New" pitchFamily="34" charset="-122"/>
                 <a:cs typeface="Courier New" pitchFamily="34" charset="-120"/>
               </a:rPr>
-              <a:t>app</a:t>
+              <a:t>authenticationType</a:t>
             </a:r>
             <a:r>
               <a:rPr lang="en-US" sz="950" dirty="0">
@@ -9282,6 +9302,28 @@
                 <a:cs typeface="Courier New" pitchFamily="34" charset="-120"/>
               </a:rPr>
               <a:t>:</a:t>
+            </a:r>
+            <a:r>
+              <a:rPr lang="en-US" sz="950" dirty="0">
+                <a:solidFill>
+                  <a:srgbClr val="CCCCCC"/>
+                </a:solidFill>
+                <a:latin typeface="Courier New" pitchFamily="34" charset="0"/>
+                <a:ea typeface="Courier New" pitchFamily="34" charset="-122"/>
+                <a:cs typeface="Courier New" pitchFamily="34" charset="-120"/>
+              </a:rPr>
+              <a:t> </a:t>
+            </a:r>
+            <a:r>
+              <a:rPr lang="en-US" sz="950" dirty="0">
+                <a:solidFill>
+                  <a:srgbClr val="CCCCCC"/>
+                </a:solidFill>
+                <a:latin typeface="Courier New" pitchFamily="34" charset="0"/>
+                <a:ea typeface="Courier New" pitchFamily="34" charset="-122"/>
+                <a:cs typeface="Courier New" pitchFamily="34" charset="-120"/>
+              </a:rPr>
+              <a:t>reentranceTicket</a:t>
             </a:r>
             <a:endParaRPr lang="en-US" sz="950" dirty="0"/>
           </a:p>
@@ -9301,7 +9343,7 @@
                 <a:ea typeface="Courier New" pitchFamily="34" charset="-122"/>
                 <a:cs typeface="Courier New" pitchFamily="34" charset="-120"/>
               </a:rPr>
-              <a:t>          </a:t>
+              <a:t>        </a:t>
             </a:r>
             <a:r>
               <a:rPr lang="en-US" sz="950" dirty="0">
@@ -9312,7 +9354,7 @@
                 <a:ea typeface="Courier New" pitchFamily="34" charset="-122"/>
                 <a:cs typeface="Courier New" pitchFamily="34" charset="-120"/>
               </a:rPr>
-              <a:t>name</a:t>
+              <a:t>app</a:t>
             </a:r>
             <a:r>
               <a:rPr lang="en-US" sz="950" dirty="0">
@@ -9324,28 +9366,6 @@
                 <a:cs typeface="Courier New" pitchFamily="34" charset="-120"/>
               </a:rPr>
               <a:t>:</a:t>
-            </a:r>
-            <a:r>
-              <a:rPr lang="en-US" sz="950" dirty="0">
-                <a:solidFill>
-                  <a:srgbClr val="CCCCCC"/>
-                </a:solidFill>
-                <a:latin typeface="Courier New" pitchFamily="34" charset="0"/>
-                <a:ea typeface="Courier New" pitchFamily="34" charset="-122"/>
-                <a:cs typeface="Courier New" pitchFamily="34" charset="-120"/>
-              </a:rPr>
-              <a:t> </a:t>
-            </a:r>
-            <a:r>
-              <a:rPr lang="en-US" sz="950" dirty="0">
-                <a:solidFill>
-                  <a:srgbClr val="CCCCCC"/>
-                </a:solidFill>
-                <a:latin typeface="Courier New" pitchFamily="34" charset="0"/>
-                <a:ea typeface="Courier New" pitchFamily="34" charset="-122"/>
-                <a:cs typeface="Courier New" pitchFamily="34" charset="-120"/>
-              </a:rPr>
-              <a:t>ZFE_TRAVELS</a:t>
             </a:r>
             <a:endParaRPr lang="en-US" sz="950" dirty="0"/>
           </a:p>
@@ -9376,7 +9396,7 @@
                 <a:ea typeface="Courier New" pitchFamily="34" charset="-122"/>
                 <a:cs typeface="Courier New" pitchFamily="34" charset="-120"/>
               </a:rPr>
-              <a:t>package</a:t>
+              <a:t>name</a:t>
             </a:r>
             <a:r>
               <a:rPr lang="en-US" sz="950" dirty="0">
@@ -9409,73 +9429,7 @@
                 <a:ea typeface="Courier New" pitchFamily="34" charset="-122"/>
                 <a:cs typeface="Courier New" pitchFamily="34" charset="-120"/>
               </a:rPr>
-              <a:t>ZFE_TRAVEL_</a:t>
-            </a:r>
-            <a:r>
-              <a:rPr lang="en-US" sz="950" dirty="0">
-                <a:solidFill>
-                  <a:srgbClr val="CCCCCC"/>
-                </a:solidFill>
-                <a:latin typeface="Courier New" pitchFamily="34" charset="0"/>
-                <a:ea typeface="Courier New" pitchFamily="34" charset="-122"/>
-                <a:cs typeface="Courier New" pitchFamily="34" charset="-120"/>
-              </a:rPr>
-              <a:t>#</a:t>
-            </a:r>
-            <a:r>
-              <a:rPr lang="en-US" sz="950" dirty="0">
-                <a:solidFill>
-                  <a:srgbClr val="CCCCCC"/>
-                </a:solidFill>
-                <a:latin typeface="Courier New" pitchFamily="34" charset="0"/>
-                <a:ea typeface="Courier New" pitchFamily="34" charset="-122"/>
-                <a:cs typeface="Courier New" pitchFamily="34" charset="-120"/>
-              </a:rPr>
-              <a:t>#</a:t>
-            </a:r>
-            <a:r>
-              <a:rPr lang="en-US" sz="950" dirty="0">
-                <a:solidFill>
-                  <a:srgbClr val="CCCCCC"/>
-                </a:solidFill>
-                <a:latin typeface="Courier New" pitchFamily="34" charset="0"/>
-                <a:ea typeface="Courier New" pitchFamily="34" charset="-122"/>
-                <a:cs typeface="Courier New" pitchFamily="34" charset="-120"/>
-              </a:rPr>
-              <a:t>#</a:t>
-            </a:r>
-            <a:r>
-              <a:rPr lang="en-US" sz="950" dirty="0">
-                <a:solidFill>
-                  <a:srgbClr val="CCCCCC"/>
-                </a:solidFill>
-                <a:latin typeface="Courier New" pitchFamily="34" charset="0"/>
-                <a:ea typeface="Courier New" pitchFamily="34" charset="-122"/>
-                <a:cs typeface="Courier New" pitchFamily="34" charset="-120"/>
-              </a:rPr>
-              <a:t>#</a:t>
-            </a:r>
-            <a:r>
-              <a:rPr lang="en-US" sz="950" dirty="0">
-                <a:solidFill>
-                  <a:srgbClr val="CCCCCC"/>
-                </a:solidFill>
-                <a:latin typeface="Courier New" pitchFamily="34" charset="0"/>
-                <a:ea typeface="Courier New" pitchFamily="34" charset="-122"/>
-                <a:cs typeface="Courier New" pitchFamily="34" charset="-120"/>
-              </a:rPr>
-              <a:t>#</a:t>
-            </a:r>
-            <a:r>
-              <a:rPr lang="en-US" sz="950" dirty="0">
-                <a:solidFill>
-                  <a:srgbClr val="CCCCCC"/>
-                </a:solidFill>
-                <a:latin typeface="Courier New" pitchFamily="34" charset="0"/>
-                <a:ea typeface="Courier New" pitchFamily="34" charset="-122"/>
-                <a:cs typeface="Courier New" pitchFamily="34" charset="-120"/>
-              </a:rPr>
-              <a:t>#</a:t>
+              <a:t>ZPC_PEDIDOS</a:t>
             </a:r>
             <a:endParaRPr lang="en-US" sz="950" dirty="0"/>
           </a:p>
@@ -9506,6 +9460,70 @@
                 <a:ea typeface="Courier New" pitchFamily="34" charset="-122"/>
                 <a:cs typeface="Courier New" pitchFamily="34" charset="-120"/>
               </a:rPr>
+              <a:t>package</a:t>
+            </a:r>
+            <a:r>
+              <a:rPr lang="en-US" sz="950" dirty="0">
+                <a:solidFill>
+                  <a:srgbClr val="CCCCCC"/>
+                </a:solidFill>
+                <a:latin typeface="Courier New" pitchFamily="34" charset="0"/>
+                <a:ea typeface="Courier New" pitchFamily="34" charset="-122"/>
+                <a:cs typeface="Courier New" pitchFamily="34" charset="-120"/>
+              </a:rPr>
+              <a:t>:</a:t>
+            </a:r>
+            <a:r>
+              <a:rPr lang="en-US" sz="950" dirty="0">
+                <a:solidFill>
+                  <a:srgbClr val="CCCCCC"/>
+                </a:solidFill>
+                <a:latin typeface="Courier New" pitchFamily="34" charset="0"/>
+                <a:ea typeface="Courier New" pitchFamily="34" charset="-122"/>
+                <a:cs typeface="Courier New" pitchFamily="34" charset="-120"/>
+              </a:rPr>
+              <a:t> </a:t>
+            </a:r>
+            <a:r>
+              <a:rPr lang="en-US" sz="950" dirty="0">
+                <a:solidFill>
+                  <a:srgbClr val="CCCCCC"/>
+                </a:solidFill>
+                <a:latin typeface="Courier New" pitchFamily="34" charset="0"/>
+                <a:ea typeface="Courier New" pitchFamily="34" charset="-122"/>
+                <a:cs typeface="Courier New" pitchFamily="34" charset="-120"/>
+              </a:rPr>
+              <a:t>ZAVBS_PC_PEDIDOS</a:t>
+            </a:r>
+            <a:endParaRPr lang="en-US" sz="950" dirty="0"/>
+          </a:p>
+          <a:p>
+            <a:pPr indent="0" marL="0">
+              <a:lnSpc>
+                <a:spcPct val="105000"/>
+              </a:lnSpc>
+              <a:buNone/>
+            </a:pPr>
+            <a:r>
+              <a:rPr lang="en-US" sz="950" dirty="0">
+                <a:solidFill>
+                  <a:srgbClr val="CCCCCC"/>
+                </a:solidFill>
+                <a:latin typeface="Courier New" pitchFamily="34" charset="0"/>
+                <a:ea typeface="Courier New" pitchFamily="34" charset="-122"/>
+                <a:cs typeface="Courier New" pitchFamily="34" charset="-120"/>
+              </a:rPr>
+              <a:t>          </a:t>
+            </a:r>
+            <a:r>
+              <a:rPr lang="en-US" sz="950" dirty="0">
+                <a:solidFill>
+                  <a:srgbClr val="CCCCCC"/>
+                </a:solidFill>
+                <a:latin typeface="Courier New" pitchFamily="34" charset="0"/>
+                <a:ea typeface="Courier New" pitchFamily="34" charset="-122"/>
+                <a:cs typeface="Courier New" pitchFamily="34" charset="-120"/>
+              </a:rPr>
               <a:t>transport</a:t>
             </a:r>
             <a:r>
@@ -9531,15 +9549,15 @@
               <a:t> </a:t>
             </a:r>
             <a:r>
-              <a:rPr lang="en-US" sz="950" dirty="0">
-                <a:solidFill>
-                  <a:srgbClr val="CE9178"/>
-                </a:solidFill>
-                <a:latin typeface="Courier New" pitchFamily="34" charset="0"/>
-                <a:ea typeface="Courier New" pitchFamily="34" charset="-122"/>
-                <a:cs typeface="Courier New" pitchFamily="34" charset="-120"/>
-              </a:rPr>
-              <a:t>''</a:t>
+              <a:rPr lang="en-US" sz="950" i="1" dirty="0">
+                <a:solidFill>
+                  <a:srgbClr val="6A9955"/>
+                </a:solidFill>
+                <a:latin typeface="Courier New" pitchFamily="34" charset="0"/>
+                <a:ea typeface="Courier New" pitchFamily="34" charset="-122"/>
+                <a:cs typeface="Courier New" pitchFamily="34" charset="-120"/>
+              </a:rPr>
+              <a:t>""</a:t>
             </a:r>
             <a:endParaRPr lang="en-US" sz="950" dirty="0"/>
           </a:p>
@@ -9783,7 +9801,7 @@
                 <a:ea typeface="Courier New" pitchFamily="34" charset="-122"/>
                 <a:cs typeface="Courier New" pitchFamily="34" charset="-120"/>
               </a:rPr>
-              <a:t>scp: true</a:t>
+              <a:t>reentranceTicket</a:t>
             </a:r>
             <a:endParaRPr lang="en-US" sz="1400" dirty="0"/>
           </a:p>
@@ -9797,7 +9815,7 @@
                   <a:srgbClr val="556B82"/>
                 </a:solidFill>
               </a:rPr>
-              <a:t>O destino é um ABAP environment na nuvem (BTP).</a:t>
+              <a:t>Login no ABAP environment do BTP pelo navegador, sem guardar senha no projeto.</a:t>
             </a:r>
             <a:endParaRPr lang="en-US" sz="1400" dirty="0"/>
           </a:p>
@@ -10037,7 +10055,26 @@
                   <a:srgbClr val="556B82"/>
                 </a:solidFill>
               </a:rPr>
-              <a:t>Pacote e ordem de transporte, como qualquer objeto ABAP.</a:t>
+              <a:t>Pacote e ordem de transporte; no trial (</a:t>
+            </a:r>
+            <a:r>
+              <a:rPr lang="en-US" sz="1050" dirty="0">
+                <a:solidFill>
+                  <a:srgbClr val="0064D9"/>
+                </a:solidFill>
+                <a:latin typeface="Courier New" pitchFamily="34" charset="0"/>
+                <a:ea typeface="Courier New" pitchFamily="34" charset="-122"/>
+                <a:cs typeface="Courier New" pitchFamily="34" charset="-120"/>
+              </a:rPr>
+              <a:t>ZLOCAL</a:t>
+            </a:r>
+            <a:r>
+              <a:rPr lang="en-US" sz="1050" dirty="0">
+                <a:solidFill>
+                  <a:srgbClr val="556B82"/>
+                </a:solidFill>
+              </a:rPr>
+              <a:t>), o transporte fica vazio.</a:t>
             </a:r>
             <a:endParaRPr lang="en-US" sz="1400" dirty="0"/>
           </a:p>
@@ -10165,7 +10202,7 @@
                   <a:srgbClr val="89D1FF"/>
                 </a:solidFill>
               </a:rPr>
-              <a:t>AULA 03.11 · SEÇÃO 2</a:t>
+              <a:t>AULA 05.11 · SEÇÃO 2</a:t>
             </a:r>
             <a:endParaRPr lang="en-US" sz="1300" dirty="0"/>
           </a:p>
@@ -11168,7 +11205,7 @@
                 <a:ea typeface="Courier New" pitchFamily="34" charset="-122"/>
                 <a:cs typeface="Courier New" pitchFamily="34" charset="-120"/>
               </a:rPr>
-              <a:t>#Travel-manage</a:t>
+              <a:t>#ZPCPedidoCompra-manage</a:t>
             </a:r>
             <a:r>
               <a:rPr lang="en-US" sz="1200" dirty="0">
@@ -11176,7 +11213,7 @@
                   <a:srgbClr val="556B82"/>
                 </a:solidFill>
               </a:rPr>
-              <a:t>.</a:t>
+              <a:t> no projeto.</a:t>
             </a:r>
             <a:endParaRPr lang="en-US" sz="1400" dirty="0"/>
           </a:p>
@@ -11435,7 +11472,7 @@
         </p:blipFill>
         <p:spPr>
           <a:xfrm>
-            <a:off x="4474731" y="2084832"/>
+            <a:off x="1598257" y="2084832"/>
             <a:ext cx="365760" cy="365760"/>
           </a:xfrm>
           <a:prstGeom prst="rect">
@@ -11459,7 +11496,7 @@
         </p:blipFill>
         <p:spPr>
           <a:xfrm>
-            <a:off x="1598257" y="2084832"/>
+            <a:off x="10227678" y="2084832"/>
             <a:ext cx="365760" cy="365760"/>
           </a:xfrm>
           <a:prstGeom prst="rect">
@@ -11483,7 +11520,7 @@
         </p:blipFill>
         <p:spPr>
           <a:xfrm>
-            <a:off x="7351205" y="2084832"/>
+            <a:off x="4474731" y="2084832"/>
             <a:ext cx="365760" cy="365760"/>
           </a:xfrm>
           <a:prstGeom prst="rect">
@@ -11507,8 +11544,8 @@
         </p:blipFill>
         <p:spPr>
           <a:xfrm>
-            <a:off x="10227678" y="2084832"/>
-            <a:ext cx="365760" cy="365760"/>
+            <a:off x="4594372" y="3928994"/>
+            <a:ext cx="225308" cy="225308"/>
           </a:xfrm>
           <a:prstGeom prst="rect">
             <a:avLst/>
@@ -11555,8 +11592,8 @@
         </p:blipFill>
         <p:spPr>
           <a:xfrm>
-            <a:off x="4594372" y="3928994"/>
-            <a:ext cx="225308" cy="225308"/>
+            <a:off x="7351205" y="2084832"/>
+            <a:ext cx="365760" cy="365760"/>
           </a:xfrm>
           <a:prstGeom prst="rect">
             <a:avLst/>
@@ -12125,7 +12162,7 @@
         </p:blipFill>
         <p:spPr>
           <a:xfrm>
-            <a:off x="877824" y="3050667"/>
+            <a:off x="6562192" y="3050667"/>
             <a:ext cx="256032" cy="256032"/>
           </a:xfrm>
           <a:prstGeom prst="rect">
@@ -12149,7 +12186,7 @@
         </p:blipFill>
         <p:spPr>
           <a:xfrm>
-            <a:off x="6562192" y="3050667"/>
+            <a:off x="877824" y="3050667"/>
             <a:ext cx="256032" cy="256032"/>
           </a:xfrm>
           <a:prstGeom prst="rect">
